--- a/Zwischenpräsentation.pptx
+++ b/Zwischenpräsentation.pptx
@@ -4195,6 +4195,27 @@
           <a:bodyPr/>
           <a:lstStyle/>
           <a:p>
+            <a:pPr>
+              <a:buNone/>
+            </a:pPr>
+            <a:r>
+              <a:rPr lang="de-DE" sz="1400" b="1" dirty="0"/>
+              <a:t>Entscheidungen</a:t>
+            </a:r>
+          </a:p>
+          <a:p>
+            <a:r>
+              <a:rPr lang="de-DE" sz="1200" dirty="0"/>
+              <a:t>Entscheidung über Programmiersprache (C#) </a:t>
+            </a:r>
+          </a:p>
+          <a:p>
+            <a:r>
+              <a:rPr lang="de-DE" sz="1200" dirty="0"/>
+              <a:t>Entwicklungsumgebung festgelegt (.NET Blazor)</a:t>
+            </a:r>
+          </a:p>
+          <a:p>
             <a:endParaRPr lang="de-AT" dirty="0"/>
           </a:p>
         </p:txBody>
@@ -8238,7 +8259,7 @@
         </p:spPr>
         <p:txBody>
           <a:bodyPr>
-            <a:normAutofit fontScale="92500" lnSpcReduction="10000"/>
+            <a:normAutofit/>
           </a:bodyPr>
           <a:lstStyle/>
           <a:p>
@@ -8246,25 +8267,25 @@
               <a:buNone/>
             </a:pPr>
             <a:r>
-              <a:rPr lang="de-DE" sz="1800" b="1" dirty="0"/>
+              <a:rPr lang="de-DE" sz="2400" b="1" dirty="0"/>
               <a:t>Übergeordnetes Ziel des Projekts</a:t>
             </a:r>
           </a:p>
           <a:p>
             <a:r>
-              <a:rPr lang="de-DE" sz="1600" dirty="0"/>
+              <a:rPr lang="de-DE" sz="2000" dirty="0"/>
               <a:t>Entwicklung eines Prototyp-Webshops für die Firma Berchtold Holzbauplan</a:t>
             </a:r>
           </a:p>
           <a:p>
             <a:r>
-              <a:rPr lang="de-DE" sz="1600" dirty="0"/>
+              <a:rPr lang="de-DE" sz="2000" dirty="0"/>
               <a:t>Ziel: Eine erste Testumgebung zur Darstellung der Grundstruktur des Webshops bereitzustellen </a:t>
             </a:r>
           </a:p>
           <a:p>
             <a:r>
-              <a:rPr lang="de-DE" sz="1600" dirty="0"/>
+              <a:rPr lang="de-DE" sz="2000" dirty="0"/>
               <a:t>Nutzer können im Prototyp verfügbare Materialien ansehen, nach Produkten suchen, die Menge wählen und sie zum Warenkorb hinzufügen.</a:t>
             </a:r>
           </a:p>
@@ -8272,32 +8293,32 @@
             <a:pPr marL="0" indent="0">
               <a:buNone/>
             </a:pPr>
-            <a:endParaRPr lang="de-AT" sz="2000" dirty="0"/>
+            <a:endParaRPr lang="de-AT" dirty="0"/>
           </a:p>
           <a:p>
             <a:pPr>
               <a:buNone/>
             </a:pPr>
             <a:r>
-              <a:rPr lang="de-DE" sz="1800" b="1" dirty="0"/>
+              <a:rPr lang="de-DE" sz="2400" b="1" dirty="0"/>
               <a:t>Ergebnisse aus Sprint 1</a:t>
             </a:r>
           </a:p>
           <a:p>
             <a:r>
-              <a:rPr lang="de-DE" sz="1600" dirty="0"/>
+              <a:rPr lang="de-DE" sz="2000" dirty="0"/>
               <a:t>Definition der grundlegenden Projektidee und Ziele</a:t>
             </a:r>
           </a:p>
           <a:p>
             <a:r>
-              <a:rPr lang="de-DE" sz="1600" dirty="0"/>
+              <a:rPr lang="de-DE" sz="2000" dirty="0"/>
               <a:t>Jira zur Verwaltung von Aufgaben und Sprints verwendet</a:t>
             </a:r>
           </a:p>
           <a:p>
             <a:r>
-              <a:rPr lang="de-DE" sz="1600" dirty="0"/>
+              <a:rPr lang="de-DE" sz="2000" dirty="0"/>
               <a:t>Erstellung eines ersten Design- und Datenbankentwurfs für den Webshop</a:t>
             </a:r>
           </a:p>
@@ -8305,40 +8326,13 @@
             <a:pPr marL="0" indent="0">
               <a:buNone/>
             </a:pPr>
-            <a:endParaRPr lang="de-AT" sz="2000" dirty="0"/>
-          </a:p>
-          <a:p>
-            <a:pPr>
-              <a:buNone/>
-            </a:pPr>
-            <a:r>
-              <a:rPr lang="de-DE" sz="1800" b="1" dirty="0"/>
-              <a:t>Entscheidungen</a:t>
-            </a:r>
-          </a:p>
-          <a:p>
-            <a:r>
-              <a:rPr lang="de-DE" sz="1600" dirty="0"/>
-              <a:t>Entscheidung über Programmiersprache (C#) </a:t>
-            </a:r>
-          </a:p>
-          <a:p>
-            <a:r>
-              <a:rPr lang="de-DE" sz="1600" dirty="0"/>
-              <a:t>Entwicklungsumgebung festgelegt (.NET Blazor)</a:t>
-            </a:r>
+            <a:endParaRPr lang="de-DE" sz="2000" dirty="0"/>
           </a:p>
           <a:p>
             <a:pPr marL="0" indent="0">
               <a:buNone/>
             </a:pPr>
-            <a:endParaRPr lang="de-DE" sz="1600" dirty="0"/>
-          </a:p>
-          <a:p>
-            <a:pPr marL="0" indent="0">
-              <a:buNone/>
-            </a:pPr>
-            <a:endParaRPr lang="de-AT" sz="2000" dirty="0"/>
+            <a:endParaRPr lang="de-AT" dirty="0"/>
           </a:p>
         </p:txBody>
       </p:sp>
